--- a/gravity/新建 Microsoft PowerPoint Presentation.pptx
+++ b/gravity/新建 Microsoft PowerPoint Presentation.pptx
@@ -15,8 +15,8 @@
     <p:sldId id="266" r:id="rId9"/>
     <p:sldId id="267" r:id="rId10"/>
     <p:sldId id="268" r:id="rId11"/>
-    <p:sldId id="269" r:id="rId12"/>
-    <p:sldId id="257" r:id="rId13"/>
+    <p:sldId id="257" r:id="rId12"/>
+    <p:sldId id="269" r:id="rId13"/>
     <p:sldId id="258" r:id="rId14"/>
   </p:sldIdLst>
   <p:sldSz cx="12192000" cy="6858000"/>
@@ -3721,6 +3721,225 @@
   <p:cSld>
     <p:spTree>
       <p:nvGrpSpPr>
+        <p:cNvPr id="1" name=""/>
+        <p:cNvGrpSpPr/>
+        <p:nvPr/>
+      </p:nvGrpSpPr>
+      <p:grpSpPr>
+        <a:xfrm>
+          <a:off x="0" y="0"/>
+          <a:ext cx="0" cy="0"/>
+          <a:chOff x="0" y="0"/>
+          <a:chExt cx="0" cy="0"/>
+        </a:xfrm>
+      </p:grpSpPr>
+      <p:pic>
+        <p:nvPicPr>
+          <p:cNvPr id="3" name="Picture 2">
+            <a:extLst>
+              <a:ext uri="{FF2B5EF4-FFF2-40B4-BE49-F238E27FC236}">
+                <a16:creationId xmlns:a16="http://schemas.microsoft.com/office/drawing/2014/main" id="{6C9B3C73-3C99-6BF0-9B6A-FE12BB7EE798}"/>
+              </a:ext>
+            </a:extLst>
+          </p:cNvPr>
+          <p:cNvPicPr>
+            <a:picLocks noChangeAspect="1"/>
+          </p:cNvPicPr>
+          <p:nvPr/>
+        </p:nvPicPr>
+        <p:blipFill>
+          <a:blip r:embed="rId2"/>
+          <a:srcRect b="37626"/>
+          <a:stretch>
+            <a:fillRect/>
+          </a:stretch>
+        </p:blipFill>
+        <p:spPr>
+          <a:xfrm>
+            <a:off x="4321143" y="458330"/>
+            <a:ext cx="4185548" cy="2655925"/>
+          </a:xfrm>
+          <a:prstGeom prst="rect">
+            <a:avLst/>
+          </a:prstGeom>
+        </p:spPr>
+      </p:pic>
+      <p:pic>
+        <p:nvPicPr>
+          <p:cNvPr id="7" name="Picture 6">
+            <a:extLst>
+              <a:ext uri="{FF2B5EF4-FFF2-40B4-BE49-F238E27FC236}">
+                <a16:creationId xmlns:a16="http://schemas.microsoft.com/office/drawing/2014/main" id="{0598CC45-3042-4C66-D764-E64E3385A5C3}"/>
+              </a:ext>
+            </a:extLst>
+          </p:cNvPr>
+          <p:cNvPicPr>
+            <a:picLocks noChangeAspect="1"/>
+          </p:cNvPicPr>
+          <p:nvPr/>
+        </p:nvPicPr>
+        <p:blipFill>
+          <a:blip r:embed="rId3"/>
+          <a:stretch>
+            <a:fillRect/>
+          </a:stretch>
+        </p:blipFill>
+        <p:spPr>
+          <a:xfrm>
+            <a:off x="2316567" y="5163390"/>
+            <a:ext cx="3515624" cy="1602172"/>
+          </a:xfrm>
+          <a:prstGeom prst="rect">
+            <a:avLst/>
+          </a:prstGeom>
+        </p:spPr>
+      </p:pic>
+      <p:pic>
+        <p:nvPicPr>
+          <p:cNvPr id="9" name="Picture 8">
+            <a:extLst>
+              <a:ext uri="{FF2B5EF4-FFF2-40B4-BE49-F238E27FC236}">
+                <a16:creationId xmlns:a16="http://schemas.microsoft.com/office/drawing/2014/main" id="{CE1D4C46-88E6-12E4-C8D8-914A317884BA}"/>
+              </a:ext>
+            </a:extLst>
+          </p:cNvPr>
+          <p:cNvPicPr>
+            <a:picLocks noChangeAspect="1"/>
+          </p:cNvPicPr>
+          <p:nvPr/>
+        </p:nvPicPr>
+        <p:blipFill>
+          <a:blip r:embed="rId4"/>
+          <a:stretch>
+            <a:fillRect/>
+          </a:stretch>
+        </p:blipFill>
+        <p:spPr>
+          <a:xfrm>
+            <a:off x="6768716" y="5163390"/>
+            <a:ext cx="3475951" cy="1602172"/>
+          </a:xfrm>
+          <a:prstGeom prst="rect">
+            <a:avLst/>
+          </a:prstGeom>
+        </p:spPr>
+      </p:pic>
+      <p:pic>
+        <p:nvPicPr>
+          <p:cNvPr id="11" name="Picture 10">
+            <a:extLst>
+              <a:ext uri="{FF2B5EF4-FFF2-40B4-BE49-F238E27FC236}">
+                <a16:creationId xmlns:a16="http://schemas.microsoft.com/office/drawing/2014/main" id="{C3FFBC24-B132-5B58-446A-669AD1CFA676}"/>
+              </a:ext>
+            </a:extLst>
+          </p:cNvPr>
+          <p:cNvPicPr>
+            <a:picLocks noChangeAspect="1"/>
+          </p:cNvPicPr>
+          <p:nvPr/>
+        </p:nvPicPr>
+        <p:blipFill>
+          <a:blip r:embed="rId5"/>
+          <a:srcRect t="62373"/>
+          <a:stretch>
+            <a:fillRect/>
+          </a:stretch>
+        </p:blipFill>
+        <p:spPr>
+          <a:xfrm>
+            <a:off x="6580139" y="3452922"/>
+            <a:ext cx="4185548" cy="1602172"/>
+          </a:xfrm>
+          <a:prstGeom prst="rect">
+            <a:avLst/>
+          </a:prstGeom>
+        </p:spPr>
+      </p:pic>
+      <p:sp>
+        <p:nvSpPr>
+          <p:cNvPr id="12" name="TextBox 11">
+            <a:extLst>
+              <a:ext uri="{FF2B5EF4-FFF2-40B4-BE49-F238E27FC236}">
+                <a16:creationId xmlns:a16="http://schemas.microsoft.com/office/drawing/2014/main" id="{BFE288D2-590B-7E78-3CDE-3BD95458021E}"/>
+              </a:ext>
+            </a:extLst>
+          </p:cNvPr>
+          <p:cNvSpPr txBox="1"/>
+          <p:nvPr/>
+        </p:nvSpPr>
+        <p:spPr>
+          <a:xfrm>
+            <a:off x="110066" y="173350"/>
+            <a:ext cx="4983544" cy="461665"/>
+          </a:xfrm>
+          <a:prstGeom prst="rect">
+            <a:avLst/>
+          </a:prstGeom>
+          <a:noFill/>
+        </p:spPr>
+        <p:txBody>
+          <a:bodyPr wrap="square" rtlCol="0">
+            <a:spAutoFit/>
+          </a:bodyPr>
+          <a:lstStyle/>
+          <a:p>
+            <a:r>
+              <a:rPr lang="en-US" altLang="zh-CN" sz="2400" dirty="0"/>
+              <a:t>Sensitivity Weighting</a:t>
+            </a:r>
+            <a:endParaRPr lang="en-CA" sz="2400" dirty="0"/>
+          </a:p>
+        </p:txBody>
+      </p:sp>
+      <p:pic>
+        <p:nvPicPr>
+          <p:cNvPr id="13" name="Picture 12">
+            <a:extLst>
+              <a:ext uri="{FF2B5EF4-FFF2-40B4-BE49-F238E27FC236}">
+                <a16:creationId xmlns:a16="http://schemas.microsoft.com/office/drawing/2014/main" id="{ABBB2FB1-6F56-7AAC-8427-7912015FCBB3}"/>
+              </a:ext>
+            </a:extLst>
+          </p:cNvPr>
+          <p:cNvPicPr>
+            <a:picLocks noChangeAspect="1"/>
+          </p:cNvPicPr>
+          <p:nvPr/>
+        </p:nvPicPr>
+        <p:blipFill>
+          <a:blip r:embed="rId2"/>
+          <a:srcRect t="62373"/>
+          <a:stretch>
+            <a:fillRect/>
+          </a:stretch>
+        </p:blipFill>
+        <p:spPr>
+          <a:xfrm>
+            <a:off x="2162218" y="3452922"/>
+            <a:ext cx="4185548" cy="1602172"/>
+          </a:xfrm>
+          <a:prstGeom prst="rect">
+            <a:avLst/>
+          </a:prstGeom>
+        </p:spPr>
+      </p:pic>
+    </p:spTree>
+    <p:extLst>
+      <p:ext uri="{BB962C8B-B14F-4D97-AF65-F5344CB8AC3E}">
+        <p14:creationId xmlns:p14="http://schemas.microsoft.com/office/powerpoint/2010/main" val="3695593064"/>
+      </p:ext>
+    </p:extLst>
+  </p:cSld>
+  <p:clrMapOvr>
+    <a:masterClrMapping/>
+  </p:clrMapOvr>
+</p:sld>
+</file>
+
+<file path=ppt/slides/slide12.xml><?xml version="1.0" encoding="utf-8"?>
+<p:sld xmlns:a="http://schemas.openxmlformats.org/drawingml/2006/main" xmlns:r="http://schemas.openxmlformats.org/officeDocument/2006/relationships" xmlns:p="http://schemas.openxmlformats.org/presentationml/2006/main">
+  <p:cSld>
+    <p:spTree>
+      <p:nvGrpSpPr>
         <p:cNvPr id="1" name="">
           <a:extLst>
             <a:ext uri="{FF2B5EF4-FFF2-40B4-BE49-F238E27FC236}">
@@ -3983,7 +4202,7 @@
 </p:sld>
 </file>
 
-<file path=ppt/slides/slide12.xml><?xml version="1.0" encoding="utf-8"?>
+<file path=ppt/slides/slide13.xml><?xml version="1.0" encoding="utf-8"?>
 <p:sld xmlns:a="http://schemas.openxmlformats.org/drawingml/2006/main" xmlns:r="http://schemas.openxmlformats.org/officeDocument/2006/relationships" xmlns:p="http://schemas.openxmlformats.org/presentationml/2006/main">
   <p:cSld>
     <p:spTree>
@@ -4005,7 +4224,7 @@
           <p:cNvPr id="3" name="Picture 2">
             <a:extLst>
               <a:ext uri="{FF2B5EF4-FFF2-40B4-BE49-F238E27FC236}">
-                <a16:creationId xmlns:a16="http://schemas.microsoft.com/office/drawing/2014/main" id="{6C9B3C73-3C99-6BF0-9B6A-FE12BB7EE798}"/>
+                <a16:creationId xmlns:a16="http://schemas.microsoft.com/office/drawing/2014/main" id="{7EF6E400-D2BF-E6E1-5FBE-485267A91C8D}"/>
               </a:ext>
             </a:extLst>
           </p:cNvPr>
@@ -4016,209 +4235,20 @@
         </p:nvPicPr>
         <p:blipFill>
           <a:blip r:embed="rId2"/>
-          <a:srcRect b="37626"/>
           <a:stretch>
             <a:fillRect/>
           </a:stretch>
         </p:blipFill>
         <p:spPr>
           <a:xfrm>
-            <a:off x="4321143" y="458330"/>
-            <a:ext cx="4185548" cy="2655925"/>
+            <a:off x="1721644" y="1574800"/>
+            <a:ext cx="8748711" cy="4816768"/>
           </a:xfrm>
           <a:prstGeom prst="rect">
             <a:avLst/>
           </a:prstGeom>
         </p:spPr>
       </p:pic>
-      <p:pic>
-        <p:nvPicPr>
-          <p:cNvPr id="7" name="Picture 6">
-            <a:extLst>
-              <a:ext uri="{FF2B5EF4-FFF2-40B4-BE49-F238E27FC236}">
-                <a16:creationId xmlns:a16="http://schemas.microsoft.com/office/drawing/2014/main" id="{0598CC45-3042-4C66-D764-E64E3385A5C3}"/>
-              </a:ext>
-            </a:extLst>
-          </p:cNvPr>
-          <p:cNvPicPr>
-            <a:picLocks noChangeAspect="1"/>
-          </p:cNvPicPr>
-          <p:nvPr/>
-        </p:nvPicPr>
-        <p:blipFill>
-          <a:blip r:embed="rId3"/>
-          <a:stretch>
-            <a:fillRect/>
-          </a:stretch>
-        </p:blipFill>
-        <p:spPr>
-          <a:xfrm>
-            <a:off x="2316567" y="5163390"/>
-            <a:ext cx="3515624" cy="1602172"/>
-          </a:xfrm>
-          <a:prstGeom prst="rect">
-            <a:avLst/>
-          </a:prstGeom>
-        </p:spPr>
-      </p:pic>
-      <p:pic>
-        <p:nvPicPr>
-          <p:cNvPr id="9" name="Picture 8">
-            <a:extLst>
-              <a:ext uri="{FF2B5EF4-FFF2-40B4-BE49-F238E27FC236}">
-                <a16:creationId xmlns:a16="http://schemas.microsoft.com/office/drawing/2014/main" id="{CE1D4C46-88E6-12E4-C8D8-914A317884BA}"/>
-              </a:ext>
-            </a:extLst>
-          </p:cNvPr>
-          <p:cNvPicPr>
-            <a:picLocks noChangeAspect="1"/>
-          </p:cNvPicPr>
-          <p:nvPr/>
-        </p:nvPicPr>
-        <p:blipFill>
-          <a:blip r:embed="rId4"/>
-          <a:stretch>
-            <a:fillRect/>
-          </a:stretch>
-        </p:blipFill>
-        <p:spPr>
-          <a:xfrm>
-            <a:off x="6768716" y="5163390"/>
-            <a:ext cx="3475951" cy="1602172"/>
-          </a:xfrm>
-          <a:prstGeom prst="rect">
-            <a:avLst/>
-          </a:prstGeom>
-        </p:spPr>
-      </p:pic>
-      <p:pic>
-        <p:nvPicPr>
-          <p:cNvPr id="11" name="Picture 10">
-            <a:extLst>
-              <a:ext uri="{FF2B5EF4-FFF2-40B4-BE49-F238E27FC236}">
-                <a16:creationId xmlns:a16="http://schemas.microsoft.com/office/drawing/2014/main" id="{C3FFBC24-B132-5B58-446A-669AD1CFA676}"/>
-              </a:ext>
-            </a:extLst>
-          </p:cNvPr>
-          <p:cNvPicPr>
-            <a:picLocks noChangeAspect="1"/>
-          </p:cNvPicPr>
-          <p:nvPr/>
-        </p:nvPicPr>
-        <p:blipFill>
-          <a:blip r:embed="rId5"/>
-          <a:srcRect t="62373"/>
-          <a:stretch>
-            <a:fillRect/>
-          </a:stretch>
-        </p:blipFill>
-        <p:spPr>
-          <a:xfrm>
-            <a:off x="6580139" y="3452922"/>
-            <a:ext cx="4185548" cy="1602172"/>
-          </a:xfrm>
-          <a:prstGeom prst="rect">
-            <a:avLst/>
-          </a:prstGeom>
-        </p:spPr>
-      </p:pic>
-      <p:sp>
-        <p:nvSpPr>
-          <p:cNvPr id="12" name="TextBox 11">
-            <a:extLst>
-              <a:ext uri="{FF2B5EF4-FFF2-40B4-BE49-F238E27FC236}">
-                <a16:creationId xmlns:a16="http://schemas.microsoft.com/office/drawing/2014/main" id="{BFE288D2-590B-7E78-3CDE-3BD95458021E}"/>
-              </a:ext>
-            </a:extLst>
-          </p:cNvPr>
-          <p:cNvSpPr txBox="1"/>
-          <p:nvPr/>
-        </p:nvSpPr>
-        <p:spPr>
-          <a:xfrm>
-            <a:off x="110066" y="173350"/>
-            <a:ext cx="4983544" cy="461665"/>
-          </a:xfrm>
-          <a:prstGeom prst="rect">
-            <a:avLst/>
-          </a:prstGeom>
-          <a:noFill/>
-        </p:spPr>
-        <p:txBody>
-          <a:bodyPr wrap="square" rtlCol="0">
-            <a:spAutoFit/>
-          </a:bodyPr>
-          <a:lstStyle/>
-          <a:p>
-            <a:r>
-              <a:rPr lang="en-US" altLang="zh-CN" sz="2400" dirty="0"/>
-              <a:t>Sensitivity Weighting</a:t>
-            </a:r>
-            <a:endParaRPr lang="en-CA" sz="2400" dirty="0"/>
-          </a:p>
-        </p:txBody>
-      </p:sp>
-      <p:pic>
-        <p:nvPicPr>
-          <p:cNvPr id="13" name="Picture 12">
-            <a:extLst>
-              <a:ext uri="{FF2B5EF4-FFF2-40B4-BE49-F238E27FC236}">
-                <a16:creationId xmlns:a16="http://schemas.microsoft.com/office/drawing/2014/main" id="{ABBB2FB1-6F56-7AAC-8427-7912015FCBB3}"/>
-              </a:ext>
-            </a:extLst>
-          </p:cNvPr>
-          <p:cNvPicPr>
-            <a:picLocks noChangeAspect="1"/>
-          </p:cNvPicPr>
-          <p:nvPr/>
-        </p:nvPicPr>
-        <p:blipFill>
-          <a:blip r:embed="rId2"/>
-          <a:srcRect t="62373"/>
-          <a:stretch>
-            <a:fillRect/>
-          </a:stretch>
-        </p:blipFill>
-        <p:spPr>
-          <a:xfrm>
-            <a:off x="2162218" y="3452922"/>
-            <a:ext cx="4185548" cy="1602172"/>
-          </a:xfrm>
-          <a:prstGeom prst="rect">
-            <a:avLst/>
-          </a:prstGeom>
-        </p:spPr>
-      </p:pic>
-    </p:spTree>
-    <p:extLst>
-      <p:ext uri="{BB962C8B-B14F-4D97-AF65-F5344CB8AC3E}">
-        <p14:creationId xmlns:p14="http://schemas.microsoft.com/office/powerpoint/2010/main" val="3695593064"/>
-      </p:ext>
-    </p:extLst>
-  </p:cSld>
-  <p:clrMapOvr>
-    <a:masterClrMapping/>
-  </p:clrMapOvr>
-</p:sld>
-</file>
-
-<file path=ppt/slides/slide13.xml><?xml version="1.0" encoding="utf-8"?>
-<p:sld xmlns:a="http://schemas.openxmlformats.org/drawingml/2006/main" xmlns:r="http://schemas.openxmlformats.org/officeDocument/2006/relationships" xmlns:p="http://schemas.openxmlformats.org/presentationml/2006/main">
-  <p:cSld>
-    <p:spTree>
-      <p:nvGrpSpPr>
-        <p:cNvPr id="1" name=""/>
-        <p:cNvGrpSpPr/>
-        <p:nvPr/>
-      </p:nvGrpSpPr>
-      <p:grpSpPr>
-        <a:xfrm>
-          <a:off x="0" y="0"/>
-          <a:ext cx="0" cy="0"/>
-          <a:chOff x="0" y="0"/>
-          <a:chExt cx="0" cy="0"/>
-        </a:xfrm>
-      </p:grpSpPr>
     </p:spTree>
     <p:extLst>
       <p:ext uri="{BB962C8B-B14F-4D97-AF65-F5344CB8AC3E}">
